--- a/lectures/week 2 & 3.pptx
+++ b/lectures/week 2 & 3.pptx
@@ -166,7 +166,7 @@
           <a:p>
             <a:fld id="{83CE43D9-4B36-481F-BEC6-BB0DB0ED2656}" type="datetimeFigureOut">
               <a:rPr lang="en-US" smtClean="0"/>
-              <a:t>2/11/2026</a:t>
+              <a:t>3/12/2026</a:t>
             </a:fld>
             <a:endParaRPr lang="en-US"/>
           </a:p>
@@ -593,7 +593,7 @@
           <a:p>
             <a:fld id="{7AA40219-BDFC-4338-8760-DE5991808A2E}" type="datetime1">
               <a:rPr lang="en-US" smtClean="0"/>
-              <a:t>2/11/2026</a:t>
+              <a:t>3/12/2026</a:t>
             </a:fld>
             <a:endParaRPr lang="en-US"/>
           </a:p>
@@ -790,7 +790,7 @@
           <a:p>
             <a:fld id="{CA8D2D47-876E-4FE9-A912-810A67959BEA}" type="datetime1">
               <a:rPr lang="en-US" smtClean="0"/>
-              <a:t>2/11/2026</a:t>
+              <a:t>3/12/2026</a:t>
             </a:fld>
             <a:endParaRPr lang="en-US"/>
           </a:p>
@@ -1019,7 +1019,7 @@
           <a:p>
             <a:fld id="{DF2B57B2-F0DC-46FD-B186-0D9C0227B45D}" type="datetime1">
               <a:rPr lang="en-US" smtClean="0"/>
-              <a:t>2/11/2026</a:t>
+              <a:t>3/12/2026</a:t>
             </a:fld>
             <a:endParaRPr lang="en-US"/>
           </a:p>
@@ -1182,7 +1182,7 @@
           <a:p>
             <a:fld id="{C2252E2D-1158-4369-B0DF-6FA112629122}" type="datetime1">
               <a:rPr lang="en-US" smtClean="0"/>
-              <a:t>2/11/2026</a:t>
+              <a:t>3/12/2026</a:t>
             </a:fld>
             <a:endParaRPr lang="en-US"/>
           </a:p>
@@ -1346,7 +1346,7 @@
           <a:p>
             <a:fld id="{6677DDAD-D024-4038-A997-D272217BB069}" type="datetime1">
               <a:rPr lang="en-US" smtClean="0"/>
-              <a:t>2/11/2026</a:t>
+              <a:t>3/12/2026</a:t>
             </a:fld>
             <a:endParaRPr lang="en-US"/>
           </a:p>
@@ -1586,7 +1586,7 @@
           <a:p>
             <a:fld id="{CDF2F63E-7234-4436-91F9-238B582E5D3A}" type="datetime1">
               <a:rPr lang="en-US" smtClean="0"/>
-              <a:t>2/11/2026</a:t>
+              <a:t>3/12/2026</a:t>
             </a:fld>
             <a:endParaRPr lang="en-US"/>
           </a:p>
@@ -18234,8 +18234,8 @@
         </p:blipFill>
         <p:spPr>
           <a:xfrm>
-            <a:off x="1824033" y="2196487"/>
-            <a:ext cx="9365437" cy="3793750"/>
+            <a:off x="1219201" y="1752600"/>
+            <a:ext cx="9970270" cy="4237637"/>
           </a:xfrm>
           <a:prstGeom prst="rect">
             <a:avLst/>
@@ -32031,7 +32031,7 @@
         </p:blipFill>
         <p:spPr>
           <a:xfrm>
-            <a:off x="1824033" y="1870071"/>
+            <a:off x="1824033" y="1941509"/>
             <a:ext cx="9036825" cy="4306891"/>
           </a:xfrm>
           <a:prstGeom prst="rect">
